--- a/curso/pptx/S66.pptx
+++ b/curso/pptx/S66.pptx
@@ -4507,7 +4507,7 @@
                 </a:solidFill>
                 <a:latin typeface="Nunito Sans"/>
               </a:rPr>
-              <a:t>Grupo nominal:</a:t>
+              <a:t>名义小组法：</a:t>
             </a:r>
             <a:r>
               <a:rPr sz="2800" b="0">
@@ -4516,7 +4516,7 @@
                 </a:solidFill>
                 <a:latin typeface="Nunito Sans"/>
               </a:rPr>
-              <a:t> cada uno escribe sus ideas en silencio; luego se puntúan todas</a:t>
+              <a:t>每个人安静地写下自己的想法；然后给所有想法打分</a:t>
             </a:r>
           </a:p>
           <a:p>
@@ -4541,7 +4541,7 @@
                 </a:solidFill>
                 <a:latin typeface="Nunito Sans"/>
               </a:rPr>
-              <a:t>Así cuentan también las ideas de los tímidos, y no mandan siempre los mismos</a:t>
+              <a:t>这样，害羞的人的想法也算数，也不会总是同样的人说了算</a:t>
             </a:r>
           </a:p>
           <a:p>
@@ -4566,7 +4566,7 @@
                 </a:solidFill>
                 <a:latin typeface="Nunito Sans"/>
               </a:rPr>
-              <a:t>Dos columnas:</a:t>
+              <a:t>两栏法：</a:t>
             </a:r>
             <a:r>
               <a:rPr sz="2800" b="0">
@@ -4575,7 +4575,7 @@
                 </a:solidFill>
                 <a:latin typeface="Nunito Sans"/>
               </a:rPr>
-              <a:t> de cada propuesta, sus ventajas y las consecuencias que no queremos</a:t>
+              <a:t>对每个提议，列出它的好处和我们不想要的后果</a:t>
             </a:r>
           </a:p>
           <a:p>
@@ -4600,7 +4600,7 @@
                 </a:solidFill>
                 <a:latin typeface="Nunito Sans"/>
               </a:rPr>
-              <a:t>Se juzga la propuesta, no a quien la hizo (第14课: ad hominem)</a:t>
+              <a:t>评判的是提议，而不是提出的人（第14课：人身攻击）</a:t>
             </a:r>
           </a:p>
         </p:txBody>
@@ -6719,7 +6719,7 @@
                 </a:solidFill>
                 <a:latin typeface="Nunito Sans"/>
               </a:rPr>
-              <a:t>Nuestro grupo: </a:t>
+              <a:t>我们的集体：</a:t>
             </a:r>
             <a:r>
               <a:rPr sz="2800" b="1">
@@ -6728,7 +6728,7 @@
                 </a:solidFill>
                 <a:latin typeface="Nunito Sans"/>
               </a:rPr>
-              <a:t>nosotros</a:t>
+              <a:t>我们</a:t>
             </a:r>
             <a:r>
               <a:rPr sz="2800" b="0">
@@ -6737,7 +6737,7 @@
                 </a:solidFill>
                 <a:latin typeface="Nunito Sans"/>
               </a:rPr>
-              <a:t>. El de fuera: </a:t>
+              <a:t>。外面的集体：</a:t>
             </a:r>
             <a:r>
               <a:rPr sz="2800" b="1">
@@ -6746,7 +6746,7 @@
                 </a:solidFill>
                 <a:latin typeface="Nunito Sans"/>
               </a:rPr>
-              <a:t>ellos</a:t>
+              <a:t>他们</a:t>
             </a:r>
           </a:p>
           <a:p>
@@ -6771,7 +6771,7 @@
                 </a:solidFill>
                 <a:latin typeface="Nunito Sans"/>
               </a:rPr>
-              <a:t>Aparece muy rápido, incluso con grupos hechos al azar</a:t>
+              <a:t>它出现得非常快，甚至在随机分成的集体里也会出现</a:t>
             </a:r>
           </a:p>
           <a:p>
@@ -6796,7 +6796,7 @@
                 </a:solidFill>
                 <a:latin typeface="Nunito Sans"/>
               </a:rPr>
-              <a:t>Puede acabar en estereotipos: ideas fijas sobre «ellos» （第19课）</a:t>
+              <a:t>它可能发展成刻板印象：对“他们”的固定看法（第19课）</a:t>
             </a:r>
           </a:p>
         </p:txBody>
@@ -7461,7 +7461,7 @@
                 </a:solidFill>
                 <a:latin typeface="Nunito Sans"/>
               </a:rPr>
-              <a:t>Lo estudió el psicólogo </a:t>
+              <a:t>由心理学家</a:t>
             </a:r>
             <a:r>
               <a:rPr sz="2800" b="1">
@@ -7470,7 +7470,7 @@
                 </a:solidFill>
                 <a:latin typeface="Nunito Sans"/>
               </a:rPr>
-              <a:t>Irving Janis</a:t>
+              <a:t>欧文·詹尼斯</a:t>
             </a:r>
             <a:r>
               <a:rPr sz="2800" b="0">
@@ -7479,7 +7479,7 @@
                 </a:solidFill>
                 <a:latin typeface="Nunito Sans"/>
               </a:rPr>
-              <a:t> (1972)</a:t>
+              <a:t>（1972）研究</a:t>
             </a:r>
           </a:p>
           <a:p>
@@ -7504,7 +7504,7 @@
                 </a:solidFill>
                 <a:latin typeface="Nunito Sans"/>
               </a:rPr>
-              <a:t>Todos creen que los demás están de acuerdo</a:t>
+              <a:t>每个人都以为别人是同意的</a:t>
             </a:r>
           </a:p>
           <a:p>
@@ -7529,7 +7529,7 @@
                 </a:solidFill>
                 <a:latin typeface="Nunito Sans"/>
               </a:rPr>
-              <a:t>Recuerda la 第29课: la conformidad de Asch</a:t>
+              <a:t>想一想第29课：阿施的从众实验</a:t>
             </a:r>
           </a:p>
         </p:txBody>

--- a/curso/pptx/S66.pptx
+++ b/curso/pptx/S66.pptx
@@ -4128,7 +4128,7 @@
                 </a:solidFill>
                 <a:latin typeface="Nunito Sans"/>
               </a:rPr>
-              <a:t>伊克尔提议骑自行车上阿尔查恩达山。天气预报说有暴风雨。玛亚伦和奥马尔在手机上看到了，但没说话：大家情绪正高，他们不想扫兴。</a:t>
+              <a:t>一个男孩提议骑自行车上阿尔查恩达山。天气预报说有暴风雨。一个女孩和一个同学在手机上看到了，但没说话：大家情绪正高，他们不想扫兴。</a:t>
             </a:r>
           </a:p>
         </p:txBody>
@@ -4176,7 +4176,7 @@
                 </a:solidFill>
                 <a:latin typeface="Nunito Sans"/>
               </a:rPr>
-              <a:t>集体里有疑虑吗？有：玛亚伦和奥马尔知道有暴风雨。</a:t>
+              <a:t>集体里有疑虑吗？有：那个女孩和那个同学知道有暴风雨。</a:t>
             </a:r>
           </a:p>
           <a:p>
@@ -4786,7 +4786,7 @@
                 </a:solidFill>
                 <a:latin typeface="Nunito Sans"/>
               </a:rPr>
-              <a:t>伊克尔是毕尔巴鄂竞技的球迷。球队赢了，他和朋友们一起庆祝；球队输了，他就很难过。他有很强烈的“我们”的感觉。</a:t>
+              <a:t>一个男孩是毕尔巴鄂竞技的球迷。球队赢了，他和朋友们一起庆祝；球队输了，他就很难过。他有很强烈的“我们”的感觉。</a:t>
             </a:r>
           </a:p>
         </p:txBody>
